--- a/presentation/unit-2/CLMS-Unit-2-Agile-Practices-and-PM.pptx
+++ b/presentation/unit-2/CLMS-Unit-2-Agile-Practices-and-PM.pptx
@@ -9365,7 +9365,7 @@
                 <a:latin typeface="Menlo"/>
                 <a:ea typeface="Menlo"/>
               </a:rPr>
-              <a:t>auth+RBAC · JsonStore</a:t>
+              <a:t>auth+RBAC · binary store</a:t>
             </a:r>
           </a:p>
         </p:txBody>
@@ -10322,7 +10322,7 @@
                 <a:latin typeface="Helvetica"/>
                 <a:ea typeface="Helvetica"/>
               </a:rPr>
-              <a:t>E = 2.4 × (1.498 KLOC)^1.05 ≈ 3.7 person-months</a:t>
+              <a:t>E = 2.4 × (1.585 KLOC)^1.05 ≈ 3.9 person-months</a:t>
             </a:r>
           </a:p>
         </p:txBody>
@@ -10402,7 +10402,7 @@
                 <a:latin typeface="Helvetica"/>
                 <a:ea typeface="Helvetica"/>
               </a:rPr>
-              <a:t>1.498 KLOC</a:t>
+              <a:t>1.585 KLOC</a:t>
             </a:r>
           </a:p>
         </p:txBody>
@@ -10442,7 +10442,7 @@
                 <a:latin typeface="Helvetica"/>
                 <a:ea typeface="Helvetica"/>
               </a:rPr>
-              <a:t>= 1,498 measured LOC of the shipped system</a:t>
+              <a:t>= 1,585 measured LOC of the shipped system</a:t>
             </a:r>
           </a:p>
         </p:txBody>
@@ -10562,7 +10562,7 @@
                 <a:latin typeface="Helvetica"/>
                 <a:ea typeface="Helvetica"/>
               </a:rPr>
-              <a:t>≈ 5.8 months for the modelled effort</a:t>
+              <a:t>≈ 3.9 months for the modelled effort</a:t>
             </a:r>
           </a:p>
         </p:txBody>
@@ -10807,7 +10807,7 @@
                 <a:latin typeface="Helvetica"/>
                 <a:ea typeface="Helvetica"/>
               </a:rPr>
-              <a:t>Estimate vs reality: the model said 3.7 person-months over 5.8 months; two builders crossed it in one summer.</a:t>
+              <a:t>Estimate vs reality: the model said 3.9 person-months over 3.9 months; two builders landed it in one summer.</a:t>
             </a:r>
           </a:p>
         </p:txBody>

--- a/presentation/unit-2/CLMS-Unit-2-Agile-Practices-and-PM.pptx
+++ b/presentation/unit-2/CLMS-Unit-2-Agile-Practices-and-PM.pptx
@@ -4821,7 +4821,7 @@
                 <a:latin typeface="Helvetica"/>
                 <a:ea typeface="Helvetica"/>
               </a:rPr>
-              <a:t>CLMS · 24CSI015 · Software Engineering with Agile Practices</a:t>
+              <a:t>KCT Library · 24CSI015 · Software Engineering with Agile Practices</a:t>
             </a:r>
           </a:p>
         </p:txBody>
@@ -6087,7 +6087,7 @@
                 <a:latin typeface="Helvetica"/>
                 <a:ea typeface="Helvetica"/>
               </a:rPr>
-              <a:t>CLMS · 24CSI015 · Software Engineering with Agile Practices</a:t>
+              <a:t>KCT Library · 24CSI015 · Software Engineering with Agile Practices</a:t>
             </a:r>
           </a:p>
         </p:txBody>
@@ -6268,7 +6268,7 @@
                 <a:latin typeface="Georgia"/>
                 <a:ea typeface="Georgia"/>
               </a:rPr>
-              <a:t>Jira CLMS is the paper trail — a live, company-managed Scrum board</a:t>
+              <a:t>Jira KCT Library is the paper trail — a live, company-managed Scrum board</a:t>
             </a:r>
           </a:p>
         </p:txBody>
@@ -6937,7 +6937,7 @@
         <p:spPr>
           <a:xfrm>
             <a:off x="1219200" y="5435600"/>
-            <a:ext cx="3610864" cy="609600"/>
+            <a:ext cx="3074448" cy="609600"/>
           </a:xfrm>
           <a:prstGeom prst="rect">
             <a:avLst/>
@@ -6963,7 +6963,7 @@
                 <a:latin typeface="Helvetica"/>
                 <a:ea typeface="Helvetica"/>
               </a:rPr>
-              <a:t>Issue keys run CLMS-1 to CLMS-55</a:t>
+              <a:t>Issue keys run NS-1 to NS-9</a:t>
             </a:r>
           </a:p>
         </p:txBody>
@@ -6976,8 +6976,8 @@
         </p:nvSpPr>
         <p:spPr>
           <a:xfrm>
-            <a:off x="4779264" y="5435600"/>
-            <a:ext cx="10028936" cy="609600"/>
+            <a:off x="4242848" y="5435600"/>
+            <a:ext cx="10565352" cy="609600"/>
           </a:xfrm>
           <a:prstGeom prst="rect">
             <a:avLst/>
@@ -7088,7 +7088,7 @@
                 <a:latin typeface="Menlo"/>
                 <a:ea typeface="Menlo"/>
               </a:rPr>
-              <a:t>project: CLMS · Scrum (company-managed)</a:t>
+              <a:t>project: KCT Library · Scrum (company-managed)</a:t>
             </a:r>
           </a:p>
         </p:txBody>
@@ -7213,7 +7213,7 @@
                 <a:latin typeface="Helvetica"/>
                 <a:ea typeface="Helvetica"/>
               </a:rPr>
-              <a:t>CLMS · 24CSI015 · Software Engineering with Agile Practices</a:t>
+              <a:t>KCT Library · 24CSI015 · Software Engineering with Agile Practices</a:t>
             </a:r>
           </a:p>
         </p:txBody>
@@ -8839,7 +8839,7 @@
                 <a:latin typeface="Helvetica"/>
                 <a:ea typeface="Helvetica"/>
               </a:rPr>
-              <a:t>CLMS · 24CSI015 · Software Engineering with Agile Practices</a:t>
+              <a:t>KCT Library · 24CSI015 · Software Engineering with Agile Practices</a:t>
             </a:r>
           </a:p>
         </p:txBody>
@@ -9150,7 +9150,7 @@
                 <a:latin typeface="Georgia"/>
                 <a:ea typeface="Georgia"/>
               </a:rPr>
-              <a:t>1 · CLMS</a:t>
+              <a:t>1 · KCT Library</a:t>
             </a:r>
           </a:p>
         </p:txBody>
@@ -10892,7 +10892,7 @@
                 <a:latin typeface="Helvetica"/>
                 <a:ea typeface="Helvetica"/>
               </a:rPr>
-              <a:t>CLMS · 24CSI015 · Software Engineering with Agile Practices</a:t>
+              <a:t>KCT Library · 24CSI015 · Software Engineering with Agile Practices</a:t>
             </a:r>
           </a:p>
         </p:txBody>
@@ -12011,7 +12011,7 @@
                 <a:latin typeface="Helvetica"/>
                 <a:ea typeface="Helvetica"/>
               </a:rPr>
-              <a:t>CLMS · 24CSI015 · Software Engineering with Agile Practices</a:t>
+              <a:t>KCT Library · 24CSI015 · Software Engineering with Agile Practices</a:t>
             </a:r>
           </a:p>
         </p:txBody>
@@ -12852,7 +12852,7 @@
                 <a:latin typeface="Helvetica"/>
                 <a:ea typeface="Helvetica"/>
               </a:rPr>
-              <a:t>CLMS · 24CSI015 · Software Engineering with Agile Practices</a:t>
+              <a:t>KCT Library · 24CSI015 · Software Engineering with Agile Practices</a:t>
             </a:r>
           </a:p>
         </p:txBody>
@@ -13823,7 +13823,7 @@
                 <a:latin typeface="Helvetica"/>
                 <a:ea typeface="Helvetica"/>
               </a:rPr>
-              <a:t>CLMS · 24CSI015 · Software Engineering with Agile Practices</a:t>
+              <a:t>KCT Library · 24CSI015 · Software Engineering with Agile Practices</a:t>
             </a:r>
           </a:p>
         </p:txBody>
@@ -15379,7 +15379,7 @@
                 <a:latin typeface="Helvetica"/>
                 <a:ea typeface="Helvetica"/>
               </a:rPr>
-              <a:t>CLMS · 24CSI015 · Software Engineering with Agile Practices</a:t>
+              <a:t>KCT Library · 24CSI015 · Software Engineering with Agile Practices</a:t>
             </a:r>
           </a:p>
         </p:txBody>
@@ -16516,7 +16516,7 @@
                 <a:latin typeface="Helvetica"/>
                 <a:ea typeface="Helvetica"/>
               </a:rPr>
-              <a:t>CLMS · 24CSI015 · Software Engineering with Agile Practices</a:t>
+              <a:t>KCT Library · 24CSI015 · Software Engineering with Agile Practices</a:t>
             </a:r>
           </a:p>
         </p:txBody>
@@ -17934,7 +17934,7 @@
                 <a:latin typeface="Helvetica"/>
                 <a:ea typeface="Helvetica"/>
               </a:rPr>
-              <a:t>CLMS · 24CSI015 · Software Engineering with Agile Practices</a:t>
+              <a:t>KCT Library · 24CSI015 · Software Engineering with Agile Practices</a:t>
             </a:r>
           </a:p>
         </p:txBody>
@@ -19239,7 +19239,7 @@
                 <a:latin typeface="Helvetica"/>
                 <a:ea typeface="Helvetica"/>
               </a:rPr>
-              <a:t>CLMS · 24CSI015 · Software Engineering with Agile Practices</a:t>
+              <a:t>KCT Library · 24CSI015 · Software Engineering with Agile Practices</a:t>
             </a:r>
           </a:p>
         </p:txBody>
@@ -20055,7 +20055,7 @@
                 <a:latin typeface="Helvetica"/>
                 <a:ea typeface="Helvetica"/>
               </a:rPr>
-              <a:t>WHY THIS WORKS FOR CLMS</a:t>
+              <a:t>WHY THIS WORKS FOR KCT LIBRARY</a:t>
             </a:r>
           </a:p>
         </p:txBody>
@@ -20865,7 +20865,7 @@
                 <a:latin typeface="Helvetica"/>
                 <a:ea typeface="Helvetica"/>
               </a:rPr>
-              <a:t>CLMS · 24CSI015 · Software Engineering with Agile Practices</a:t>
+              <a:t>KCT Library · 24CSI015 · Software Engineering with Agile Practices</a:t>
             </a:r>
           </a:p>
         </p:txBody>
@@ -22701,7 +22701,7 @@
                 <a:latin typeface="Helvetica"/>
                 <a:ea typeface="Helvetica"/>
               </a:rPr>
-              <a:t>CLMS · 24CSI015 · Software Engineering with Agile Practices</a:t>
+              <a:t>KCT Library · 24CSI015 · Software Engineering with Agile Practices</a:t>
             </a:r>
           </a:p>
         </p:txBody>
@@ -23636,7 +23636,7 @@
                 <a:latin typeface="Helvetica"/>
                 <a:ea typeface="Helvetica"/>
               </a:rPr>
-              <a:t>CLMS · 24CSI015 · Software Engineering with Agile Practices</a:t>
+              <a:t>KCT Library · 24CSI015 · Software Engineering with Agile Practices</a:t>
             </a:r>
           </a:p>
         </p:txBody>

--- a/presentation/unit-2/CLMS-Unit-2-Agile-Practices-and-PM.pptx
+++ b/presentation/unit-2/CLMS-Unit-2-Agile-Practices-and-PM.pptx
@@ -3306,7 +3306,7 @@
                 <a:latin typeface="Helvetica"/>
                 <a:ea typeface="Helvetica"/>
               </a:rPr>
-              <a:t>COURSE 24CSI015 · SOFTWARE ENGINEERING WITH AGILE PRACTICES</a:t>
+              <a:t>KCT LIBRARY — SYSTEM DOCUMENTATION</a:t>
             </a:r>
           </a:p>
         </p:txBody>
@@ -3636,7 +3636,7 @@
                 <a:latin typeface="Helvetica"/>
                 <a:ea typeface="Helvetica"/>
               </a:rPr>
-              <a:t>S. Nidhish Guhan S</a:t>
+              <a:t>Library Administration</a:t>
             </a:r>
           </a:p>
         </p:txBody>
@@ -3676,7 +3676,7 @@
                 <a:latin typeface="Helvetica"/>
                 <a:ea typeface="Helvetica"/>
               </a:rPr>
-              <a:t>— Product Owner / Developer</a:t>
+              <a:t>— Product Owner</a:t>
             </a:r>
           </a:p>
         </p:txBody>
@@ -3716,7 +3716,7 @@
                 <a:latin typeface="Helvetica"/>
                 <a:ea typeface="Helvetica"/>
               </a:rPr>
-              <a:t>Kawaskar J</a:t>
+              <a:t>Library IT</a:t>
             </a:r>
           </a:p>
         </p:txBody>
@@ -3756,7 +3756,7 @@
                 <a:latin typeface="Helvetica"/>
                 <a:ea typeface="Helvetica"/>
               </a:rPr>
-              <a:t>— Scrum Master / Developer</a:t>
+              <a:t>— System Administration</a:t>
             </a:r>
           </a:p>
         </p:txBody>
@@ -3796,7 +3796,7 @@
                 <a:latin typeface="Menlo"/>
                 <a:ea typeface="Menlo"/>
               </a:rPr>
-              <a:t>Project seminar · September 2026</a:t>
+              <a:t>KCT Library · System documentation</a:t>
             </a:r>
           </a:p>
         </p:txBody>
@@ -4821,7 +4821,7 @@
                 <a:latin typeface="Helvetica"/>
                 <a:ea typeface="Helvetica"/>
               </a:rPr>
-              <a:t>KCT Library · 24CSI015 · Software Engineering with Agile Practices</a:t>
+              <a:t>KCT Library</a:t>
             </a:r>
           </a:p>
         </p:txBody>
@@ -6087,7 +6087,7 @@
                 <a:latin typeface="Helvetica"/>
                 <a:ea typeface="Helvetica"/>
               </a:rPr>
-              <a:t>KCT Library · 24CSI015 · Software Engineering with Agile Practices</a:t>
+              <a:t>KCT Library</a:t>
             </a:r>
           </a:p>
         </p:txBody>
@@ -7213,7 +7213,7 @@
                 <a:latin typeface="Helvetica"/>
                 <a:ea typeface="Helvetica"/>
               </a:rPr>
-              <a:t>KCT Library · 24CSI015 · Software Engineering with Agile Practices</a:t>
+              <a:t>KCT Library</a:t>
             </a:r>
           </a:p>
         </p:txBody>
@@ -7581,7 +7581,7 @@
                           <a:latin typeface="Helvetica"/>
                           <a:ea typeface="Helvetica"/>
                         </a:rPr>
-                        <a:t>S. Nidhish Guhan S</a:t>
+                        <a:t>Library Administration</a:t>
                       </a:r>
                     </a:p>
                   </a:txBody>
@@ -7679,7 +7679,7 @@
                           <a:latin typeface="Helvetica"/>
                           <a:ea typeface="Helvetica"/>
                         </a:rPr>
-                        <a:t>Kawaskar J</a:t>
+                        <a:t>Library IT</a:t>
                       </a:r>
                     </a:p>
                   </a:txBody>
@@ -8839,7 +8839,7 @@
                 <a:latin typeface="Helvetica"/>
                 <a:ea typeface="Helvetica"/>
               </a:rPr>
-              <a:t>KCT Library · 24CSI015 · Software Engineering with Agile Practices</a:t>
+              <a:t>KCT Library</a:t>
             </a:r>
           </a:p>
         </p:txBody>
@@ -10892,7 +10892,7 @@
                 <a:latin typeface="Helvetica"/>
                 <a:ea typeface="Helvetica"/>
               </a:rPr>
-              <a:t>KCT Library · 24CSI015 · Software Engineering with Agile Practices</a:t>
+              <a:t>KCT Library</a:t>
             </a:r>
           </a:p>
         </p:txBody>
@@ -12011,7 +12011,7 @@
                 <a:latin typeface="Helvetica"/>
                 <a:ea typeface="Helvetica"/>
               </a:rPr>
-              <a:t>KCT Library · 24CSI015 · Software Engineering with Agile Practices</a:t>
+              <a:t>KCT Library</a:t>
             </a:r>
           </a:p>
         </p:txBody>
@@ -12852,7 +12852,7 @@
                 <a:latin typeface="Helvetica"/>
                 <a:ea typeface="Helvetica"/>
               </a:rPr>
-              <a:t>KCT Library · 24CSI015 · Software Engineering with Agile Practices</a:t>
+              <a:t>KCT Library</a:t>
             </a:r>
           </a:p>
         </p:txBody>
@@ -13823,7 +13823,7 @@
                 <a:latin typeface="Helvetica"/>
                 <a:ea typeface="Helvetica"/>
               </a:rPr>
-              <a:t>KCT Library · 24CSI015 · Software Engineering with Agile Practices</a:t>
+              <a:t>KCT Library</a:t>
             </a:r>
           </a:p>
         </p:txBody>
@@ -15379,7 +15379,7 @@
                 <a:latin typeface="Helvetica"/>
                 <a:ea typeface="Helvetica"/>
               </a:rPr>
-              <a:t>KCT Library · 24CSI015 · Software Engineering with Agile Practices</a:t>
+              <a:t>KCT Library</a:t>
             </a:r>
           </a:p>
         </p:txBody>
@@ -16306,7 +16306,7 @@
                 <a:latin typeface="Helvetica"/>
                 <a:ea typeface="Helvetica"/>
               </a:rPr>
-              <a:t>PO: S. Nidhish Guhan S — Product Owner / Developer</a:t>
+              <a:t>PO: Library Administration — Product Owner</a:t>
             </a:r>
           </a:p>
         </p:txBody>
@@ -16391,7 +16391,7 @@
                 <a:latin typeface="Helvetica"/>
                 <a:ea typeface="Helvetica"/>
               </a:rPr>
-              <a:t>SM: Kawaskar J — Scrum Master / Developer</a:t>
+              <a:t>SM: Library IT — System Administration</a:t>
             </a:r>
           </a:p>
         </p:txBody>
@@ -16516,7 +16516,7 @@
                 <a:latin typeface="Helvetica"/>
                 <a:ea typeface="Helvetica"/>
               </a:rPr>
-              <a:t>KCT Library · 24CSI015 · Software Engineering with Agile Practices</a:t>
+              <a:t>KCT Library</a:t>
             </a:r>
           </a:p>
         </p:txBody>
@@ -17849,7 +17849,7 @@
                 <a:latin typeface="Menlo"/>
                 <a:ea typeface="Menlo"/>
               </a:rPr>
-              <a:t>Epic sums reconcile to scope: 58 + 68 = 126 pts · Nidhish 61 + Kawaskar 64 = 125 delivered.</a:t>
+              <a:t>Epic sums reconcile to scope: 58 + 68 = 126 pts planned · 125 pts delivered.</a:t>
             </a:r>
           </a:p>
         </p:txBody>
@@ -17934,7 +17934,7 @@
                 <a:latin typeface="Helvetica"/>
                 <a:ea typeface="Helvetica"/>
               </a:rPr>
-              <a:t>KCT Library · 24CSI015 · Software Engineering with Agile Practices</a:t>
+              <a:t>KCT Library</a:t>
             </a:r>
           </a:p>
         </p:txBody>
@@ -19239,7 +19239,7 @@
                 <a:latin typeface="Helvetica"/>
                 <a:ea typeface="Helvetica"/>
               </a:rPr>
-              <a:t>KCT Library · 24CSI015 · Software Engineering with Agile Practices</a:t>
+              <a:t>KCT Library</a:t>
             </a:r>
           </a:p>
         </p:txBody>
@@ -20865,7 +20865,7 @@
                 <a:latin typeface="Helvetica"/>
                 <a:ea typeface="Helvetica"/>
               </a:rPr>
-              <a:t>KCT Library · 24CSI015 · Software Engineering with Agile Practices</a:t>
+              <a:t>KCT Library</a:t>
             </a:r>
           </a:p>
         </p:txBody>
@@ -22701,7 +22701,7 @@
                 <a:latin typeface="Helvetica"/>
                 <a:ea typeface="Helvetica"/>
               </a:rPr>
-              <a:t>KCT Library · 24CSI015 · Software Engineering with Agile Practices</a:t>
+              <a:t>KCT Library</a:t>
             </a:r>
           </a:p>
         </p:txBody>
@@ -23636,7 +23636,7 @@
                 <a:latin typeface="Helvetica"/>
                 <a:ea typeface="Helvetica"/>
               </a:rPr>
-              <a:t>KCT Library · 24CSI015 · Software Engineering with Agile Practices</a:t>
+              <a:t>KCT Library</a:t>
             </a:r>
           </a:p>
         </p:txBody>
